--- a/medical_accident_its_analysis/manuscript/hp_supplementary_figures.pptx
+++ b/medical_accident_its_analysis/manuscript/hp_supplementary_figures.pptx
@@ -331,7 +331,7 @@
           <a:p>
             <a:fld id="{C1FF6DA9-008F-8B48-92A6-B652298478BF}" type="slidenum">
               <a:rPr lang="en-US" smtClean="0"/>
-              <a:t>‹#›</a:t>
+              <a:t>#</a:t>
             </a:fld>
             <a:endParaRPr lang="en-US"/>
           </a:p>
@@ -573,7 +573,7 @@
           <a:p>
             <a:fld id="{C1FF6DA9-008F-8B48-92A6-B652298478BF}" type="slidenum">
               <a:rPr lang="en-US" smtClean="0"/>
-              <a:t>‹#›</a:t>
+              <a:t>#</a:t>
             </a:fld>
             <a:endParaRPr lang="en-US"/>
           </a:p>
@@ -743,7 +743,7 @@
           <a:p>
             <a:fld id="{C1FF6DA9-008F-8B48-92A6-B652298478BF}" type="slidenum">
               <a:rPr lang="en-US" smtClean="0"/>
-              <a:t>‹#›</a:t>
+              <a:t>#</a:t>
             </a:fld>
             <a:endParaRPr lang="en-US"/>
           </a:p>
@@ -913,7 +913,7 @@
           <a:p>
             <a:fld id="{C1FF6DA9-008F-8B48-92A6-B652298478BF}" type="slidenum">
               <a:rPr lang="en-US" smtClean="0"/>
-              <a:t>‹#›</a:t>
+              <a:t>#</a:t>
             </a:fld>
             <a:endParaRPr lang="en-US"/>
           </a:p>
@@ -1093,7 +1093,7 @@
           <a:p>
             <a:fld id="{C1FF6DA9-008F-8B48-92A6-B652298478BF}" type="slidenum">
               <a:rPr lang="en-US" smtClean="0"/>
-              <a:t>‹#›</a:t>
+              <a:t>#</a:t>
             </a:fld>
             <a:endParaRPr lang="en-US"/>
           </a:p>
@@ -1273,7 +1273,7 @@
           <a:p>
             <a:fld id="{C1FF6DA9-008F-8B48-92A6-B652298478BF}" type="slidenum">
               <a:rPr lang="en-US" smtClean="0"/>
-              <a:t>‹#›</a:t>
+              <a:t>#</a:t>
             </a:fld>
             <a:endParaRPr lang="en-US"/>
           </a:p>
@@ -1443,7 +1443,7 @@
           <a:p>
             <a:fld id="{C1FF6DA9-008F-8B48-92A6-B652298478BF}" type="slidenum">
               <a:rPr lang="en-US" smtClean="0"/>
-              <a:t>‹#›</a:t>
+              <a:t>#</a:t>
             </a:fld>
             <a:endParaRPr lang="en-US"/>
           </a:p>
@@ -1613,7 +1613,7 @@
           <a:p>
             <a:fld id="{C1FF6DA9-008F-8B48-92A6-B652298478BF}" type="slidenum">
               <a:rPr lang="en-US" smtClean="0"/>
-              <a:t>‹#›</a:t>
+              <a:t>#</a:t>
             </a:fld>
             <a:endParaRPr lang="en-US"/>
           </a:p>
@@ -1859,7 +1859,7 @@
           <a:p>
             <a:fld id="{C1FF6DA9-008F-8B48-92A6-B652298478BF}" type="slidenum">
               <a:rPr lang="en-US" smtClean="0"/>
-              <a:t>‹#›</a:t>
+              <a:t>#</a:t>
             </a:fld>
             <a:endParaRPr lang="en-US"/>
           </a:p>
@@ -2105,7 +2105,7 @@
           <a:p>
             <a:fld id="{C1FF6DA9-008F-8B48-92A6-B652298478BF}" type="slidenum">
               <a:rPr lang="en-US" smtClean="0"/>
-              <a:t>‹#›</a:t>
+              <a:t>#</a:t>
             </a:fld>
             <a:endParaRPr lang="en-US"/>
           </a:p>
@@ -2393,7 +2393,7 @@
           <a:p>
             <a:fld id="{C1FF6DA9-008F-8B48-92A6-B652298478BF}" type="slidenum">
               <a:rPr lang="en-US" smtClean="0"/>
-              <a:t>‹#›</a:t>
+              <a:t>#</a:t>
             </a:fld>
             <a:endParaRPr lang="en-US"/>
           </a:p>
@@ -2681,7 +2681,7 @@
           <a:p>
             <a:fld id="{C1FF6DA9-008F-8B48-92A6-B652298478BF}" type="slidenum">
               <a:rPr lang="en-US" smtClean="0"/>
-              <a:t>‹#›</a:t>
+              <a:t>#</a:t>
             </a:fld>
             <a:endParaRPr lang="en-US"/>
           </a:p>
@@ -3103,7 +3103,7 @@
           <a:p>
             <a:fld id="{C1FF6DA9-008F-8B48-92A6-B652298478BF}" type="slidenum">
               <a:rPr lang="en-US" smtClean="0"/>
-              <a:t>‹#›</a:t>
+              <a:t>#</a:t>
             </a:fld>
             <a:endParaRPr lang="en-US"/>
           </a:p>
@@ -3525,7 +3525,7 @@
           <a:p>
             <a:fld id="{C1FF6DA9-008F-8B48-92A6-B652298478BF}" type="slidenum">
               <a:rPr lang="en-US" smtClean="0"/>
-              <a:t>‹#›</a:t>
+              <a:t>#</a:t>
             </a:fld>
             <a:endParaRPr lang="en-US"/>
           </a:p>
@@ -3643,7 +3643,7 @@
           <a:p>
             <a:fld id="{C1FF6DA9-008F-8B48-92A6-B652298478BF}" type="slidenum">
               <a:rPr lang="en-US" smtClean="0"/>
-              <a:t>‹#›</a:t>
+              <a:t>#</a:t>
             </a:fld>
             <a:endParaRPr lang="en-US"/>
           </a:p>
@@ -3761,7 +3761,7 @@
           <a:p>
             <a:fld id="{C1FF6DA9-008F-8B48-92A6-B652298478BF}" type="slidenum">
               <a:rPr lang="en-US" smtClean="0"/>
-              <a:t>‹#›</a:t>
+              <a:t>#</a:t>
             </a:fld>
             <a:endParaRPr lang="en-US"/>
           </a:p>
@@ -3856,7 +3856,7 @@
           <a:p>
             <a:fld id="{C1FF6DA9-008F-8B48-92A6-B652298478BF}" type="slidenum">
               <a:rPr lang="en-US" smtClean="0"/>
-              <a:t>‹#›</a:t>
+              <a:t>#</a:t>
             </a:fld>
             <a:endParaRPr lang="en-US"/>
           </a:p>
@@ -3951,7 +3951,7 @@
           <a:p>
             <a:fld id="{C1FF6DA9-008F-8B48-92A6-B652298478BF}" type="slidenum">
               <a:rPr lang="en-US" smtClean="0"/>
-              <a:t>‹#›</a:t>
+              <a:t>#</a:t>
             </a:fld>
             <a:endParaRPr lang="en-US"/>
           </a:p>
@@ -4228,7 +4228,7 @@
           <a:p>
             <a:fld id="{C1FF6DA9-008F-8B48-92A6-B652298478BF}" type="slidenum">
               <a:rPr lang="en-US" smtClean="0"/>
-              <a:t>‹#›</a:t>
+              <a:t>#</a:t>
             </a:fld>
             <a:endParaRPr lang="en-US"/>
           </a:p>
@@ -4505,7 +4505,7 @@
           <a:p>
             <a:fld id="{C1FF6DA9-008F-8B48-92A6-B652298478BF}" type="slidenum">
               <a:rPr lang="en-US" smtClean="0"/>
-              <a:t>‹#›</a:t>
+              <a:t>#</a:t>
             </a:fld>
             <a:endParaRPr lang="en-US"/>
           </a:p>
@@ -4758,7 +4758,7 @@
           <a:p>
             <a:fld id="{C1FF6DA9-008F-8B48-92A6-B652298478BF}" type="slidenum">
               <a:rPr lang="en-US" smtClean="0"/>
-              <a:t>‹#›</a:t>
+              <a:t>#</a:t>
             </a:fld>
             <a:endParaRPr lang="en-US"/>
           </a:p>
@@ -5011,7 +5011,7 @@
           <a:p>
             <a:fld id="{C1FF6DA9-008F-8B48-92A6-B652298478BF}" type="slidenum">
               <a:rPr lang="en-US" smtClean="0"/>
-              <a:t>‹#›</a:t>
+              <a:t>#</a:t>
             </a:fld>
             <a:endParaRPr lang="en-US"/>
           </a:p>
@@ -5260,7 +5260,7 @@
           <a:p>
             <a:fld id="{C1FF6DA9-008F-8B48-92A6-B652298478BF}" type="slidenum">
               <a:rPr lang="en-US" smtClean="0"/>
-              <a:t>‹#›</a:t>
+              <a:t>#</a:t>
             </a:fld>
             <a:endParaRPr lang="en-US"/>
           </a:p>
@@ -5310,7 +5310,7 @@
           <a:spcPct val="20000"/>
         </a:spcBef>
         <a:buFont typeface="Arial"/>
-        <a:buChar char="•"/>
+        <a:buChar char="*"/>
         <a:defRPr sz="3200" kern="1200">
           <a:solidFill>
             <a:schemeClr val="tx1"/>
@@ -5325,7 +5325,7 @@
           <a:spcPct val="20000"/>
         </a:spcBef>
         <a:buFont typeface="Arial"/>
-        <a:buChar char="–"/>
+        <a:buChar char="-"/>
         <a:defRPr sz="2800" kern="1200">
           <a:solidFill>
             <a:schemeClr val="tx1"/>
@@ -5340,7 +5340,7 @@
           <a:spcPct val="20000"/>
         </a:spcBef>
         <a:buFont typeface="Arial"/>
-        <a:buChar char="•"/>
+        <a:buChar char="*"/>
         <a:defRPr sz="2400" kern="1200">
           <a:solidFill>
             <a:schemeClr val="tx1"/>
@@ -5355,7 +5355,7 @@
           <a:spcPct val="20000"/>
         </a:spcBef>
         <a:buFont typeface="Arial"/>
-        <a:buChar char="–"/>
+        <a:buChar char="-"/>
         <a:defRPr sz="2000" kern="1200">
           <a:solidFill>
             <a:schemeClr val="tx1"/>
@@ -5370,7 +5370,7 @@
           <a:spcPct val="20000"/>
         </a:spcBef>
         <a:buFont typeface="Arial"/>
-        <a:buChar char="»"/>
+        <a:buChar char="&gt;&gt;"/>
         <a:defRPr sz="2000" kern="1200">
           <a:solidFill>
             <a:schemeClr val="tx1"/>
@@ -5385,7 +5385,7 @@
           <a:spcPct val="20000"/>
         </a:spcBef>
         <a:buFont typeface="Arial"/>
-        <a:buChar char="•"/>
+        <a:buChar char="*"/>
         <a:defRPr sz="2000" kern="1200">
           <a:solidFill>
             <a:schemeClr val="tx1"/>
@@ -5400,7 +5400,7 @@
           <a:spcPct val="20000"/>
         </a:spcBef>
         <a:buFont typeface="Arial"/>
-        <a:buChar char="•"/>
+        <a:buChar char="*"/>
         <a:defRPr sz="2000" kern="1200">
           <a:solidFill>
             <a:schemeClr val="tx1"/>
@@ -5415,7 +5415,7 @@
           <a:spcPct val="20000"/>
         </a:spcBef>
         <a:buFont typeface="Arial"/>
-        <a:buChar char="•"/>
+        <a:buChar char="*"/>
         <a:defRPr sz="2000" kern="1200">
           <a:solidFill>
             <a:schemeClr val="tx1"/>
@@ -5430,7 +5430,7 @@
           <a:spcPct val="20000"/>
         </a:spcBef>
         <a:buFont typeface="Arial"/>
-        <a:buChar char="•"/>
+        <a:buChar char="*"/>
         <a:defRPr sz="2000" kern="1200">
           <a:solidFill>
             <a:schemeClr val="tx1"/>
@@ -5770,7 +5770,7 @@
           <a:p>
             <a:fld id="{C1FF6DA9-008F-8B48-92A6-B652298478BF}" type="slidenum">
               <a:rPr lang="en-US" smtClean="0"/>
-              <a:t>‹#›</a:t>
+              <a:t>#</a:t>
             </a:fld>
             <a:endParaRPr lang="en-US"/>
           </a:p>
@@ -5820,7 +5820,7 @@
           <a:spcPct val="20000"/>
         </a:spcBef>
         <a:buFont typeface="Arial"/>
-        <a:buChar char="•"/>
+        <a:buChar char="*"/>
         <a:defRPr sz="3200" kern="1200">
           <a:solidFill>
             <a:schemeClr val="tx1"/>
@@ -5835,7 +5835,7 @@
           <a:spcPct val="20000"/>
         </a:spcBef>
         <a:buFont typeface="Arial"/>
-        <a:buChar char="–"/>
+        <a:buChar char="-"/>
         <a:defRPr sz="2800" kern="1200">
           <a:solidFill>
             <a:schemeClr val="tx1"/>
@@ -5850,7 +5850,7 @@
           <a:spcPct val="20000"/>
         </a:spcBef>
         <a:buFont typeface="Arial"/>
-        <a:buChar char="•"/>
+        <a:buChar char="*"/>
         <a:defRPr sz="2400" kern="1200">
           <a:solidFill>
             <a:schemeClr val="tx1"/>
@@ -5865,7 +5865,7 @@
           <a:spcPct val="20000"/>
         </a:spcBef>
         <a:buFont typeface="Arial"/>
-        <a:buChar char="–"/>
+        <a:buChar char="-"/>
         <a:defRPr sz="2000" kern="1200">
           <a:solidFill>
             <a:schemeClr val="tx1"/>
@@ -5880,7 +5880,7 @@
           <a:spcPct val="20000"/>
         </a:spcBef>
         <a:buFont typeface="Arial"/>
-        <a:buChar char="»"/>
+        <a:buChar char="&gt;&gt;"/>
         <a:defRPr sz="2000" kern="1200">
           <a:solidFill>
             <a:schemeClr val="tx1"/>
@@ -5895,7 +5895,7 @@
           <a:spcPct val="20000"/>
         </a:spcBef>
         <a:buFont typeface="Arial"/>
-        <a:buChar char="•"/>
+        <a:buChar char="*"/>
         <a:defRPr sz="2000" kern="1200">
           <a:solidFill>
             <a:schemeClr val="tx1"/>
@@ -5910,7 +5910,7 @@
           <a:spcPct val="20000"/>
         </a:spcBef>
         <a:buFont typeface="Arial"/>
-        <a:buChar char="•"/>
+        <a:buChar char="*"/>
         <a:defRPr sz="2000" kern="1200">
           <a:solidFill>
             <a:schemeClr val="tx1"/>
@@ -5925,7 +5925,7 @@
           <a:spcPct val="20000"/>
         </a:spcBef>
         <a:buFont typeface="Arial"/>
-        <a:buChar char="•"/>
+        <a:buChar char="*"/>
         <a:defRPr sz="2000" kern="1200">
           <a:solidFill>
             <a:schemeClr val="tx1"/>
@@ -5940,7 +5940,7 @@
           <a:spcPct val="20000"/>
         </a:spcBef>
         <a:buFont typeface="Arial"/>
-        <a:buChar char="•"/>
+        <a:buChar char="*"/>
         <a:defRPr sz="2000" kern="1200">
           <a:solidFill>
             <a:schemeClr val="tx1"/>
@@ -6137,7 +6137,7 @@
           <a:p>
             <a:r>
               <a:rPr sz="1400"/>
-              <a:t>Closed malpractice claims per 1,000 physicians by specialty, 2008–2024 (rates, not counts).</a:t>
+              <a:t>Closed malpractice claims per 1,000 physicians by specialty, 2008-2024 (rates, not counts).</a:t>
             </a:r>
           </a:p>
         </p:txBody>
@@ -6296,10 +6296,10 @@
         <a:latin typeface="Calibri"/>
         <a:ea typeface=""/>
         <a:cs typeface=""/>
-        <a:font script="Jpan" typeface="ＭＳ Ｐゴシック"/>
-        <a:font script="Hang" typeface="맑은 고딕"/>
-        <a:font script="Hans" typeface="宋体"/>
-        <a:font script="Hant" typeface="新細明體"/>
+        <a:font script="Jpan" typeface="MS PGothic"/>
+        <a:font script="Hang" typeface="Malgun Gothic"/>
+        <a:font script="Hans" typeface="SimSun"/>
+        <a:font script="Hant" typeface="PMingLiU"/>
         <a:font script="Arab" typeface="Times New Roman"/>
         <a:font script="Hebr" typeface="Times New Roman"/>
         <a:font script="Thai" typeface="Angsana New"/>
@@ -6331,10 +6331,10 @@
         <a:latin typeface="Calibri"/>
         <a:ea typeface=""/>
         <a:cs typeface=""/>
-        <a:font script="Jpan" typeface="ＭＳ Ｐゴシック"/>
-        <a:font script="Hang" typeface="맑은 고딕"/>
-        <a:font script="Hans" typeface="宋体"/>
-        <a:font script="Hant" typeface="新細明體"/>
+        <a:font script="Jpan" typeface="MS PGothic"/>
+        <a:font script="Hang" typeface="Malgun Gothic"/>
+        <a:font script="Hans" typeface="SimSun"/>
+        <a:font script="Hant" typeface="PMingLiU"/>
         <a:font script="Arab" typeface="Arial"/>
         <a:font script="Hebr" typeface="Arial"/>
         <a:font script="Thai" typeface="Cordia New"/>
@@ -6616,10 +6616,10 @@
         <a:latin typeface="Calibri"/>
         <a:ea typeface=""/>
         <a:cs typeface=""/>
-        <a:font script="Jpan" typeface="ＭＳ Ｐゴシック"/>
-        <a:font script="Hang" typeface="맑은 고딕"/>
-        <a:font script="Hans" typeface="宋体"/>
-        <a:font script="Hant" typeface="新細明體"/>
+        <a:font script="Jpan" typeface="MS PGothic"/>
+        <a:font script="Hang" typeface="Malgun Gothic"/>
+        <a:font script="Hans" typeface="SimSun"/>
+        <a:font script="Hant" typeface="PMingLiU"/>
         <a:font script="Arab" typeface="Times New Roman"/>
         <a:font script="Hebr" typeface="Times New Roman"/>
         <a:font script="Thai" typeface="Angsana New"/>
@@ -6651,10 +6651,10 @@
         <a:latin typeface="Calibri"/>
         <a:ea typeface=""/>
         <a:cs typeface=""/>
-        <a:font script="Jpan" typeface="ＭＳ Ｐゴシック"/>
-        <a:font script="Hang" typeface="맑은 고딕"/>
-        <a:font script="Hans" typeface="宋体"/>
-        <a:font script="Hant" typeface="新細明體"/>
+        <a:font script="Jpan" typeface="MS PGothic"/>
+        <a:font script="Hang" typeface="Malgun Gothic"/>
+        <a:font script="Hans" typeface="SimSun"/>
+        <a:font script="Hant" typeface="PMingLiU"/>
         <a:font script="Arab" typeface="Arial"/>
         <a:font script="Hebr" typeface="Arial"/>
         <a:font script="Thai" typeface="Cordia New"/>
